--- a/public/fun/pack/pptx/news/카드뉴스_38_계절안부_군고구마골목.pptx
+++ b/public/fun/pack/pptx/news/카드뉴스_38_계절안부_군고구마골목.pptx
@@ -3287,14 +3287,6 @@
 <file path=ppt/slides/slide1.xml><?xml version="1.0" encoding="utf-8"?>
 <p:sld xmlns:a="http://schemas.openxmlformats.org/drawingml/2006/main" xmlns:p="http://schemas.openxmlformats.org/presentationml/2006/main" xmlns:r="http://schemas.openxmlformats.org/officeDocument/2006/relationships">
   <p:cSld>
-    <p:bg>
-      <p:bgPr>
-        <a:solidFill>
-          <a:srgbClr val="FBF3EF"/>
-        </a:solidFill>
-        <a:effectLst/>
-      </p:bgPr>
-    </p:bg>
     <p:spTree>
       <p:nvGrpSpPr>
         <p:cNvPr id="1" name=""/>
@@ -3302,383 +3294,30 @@
         <p:nvPr/>
       </p:nvGrpSpPr>
       <p:grpSpPr/>
-      <p:sp>
-        <p:nvSpPr>
-          <p:cNvPr id="3" name="장식"/>
-          <p:cNvSpPr/>
+      <p:pic>
+        <p:nvPicPr>
+          <p:cNvPr id="3" name="표지 그림" descr="news-38.jpg"/>
+          <p:cNvPicPr>
+            <a:picLocks noChangeAspect="1"/>
+          </p:cNvPicPr>
           <p:nvPr/>
-        </p:nvSpPr>
-        <p:spPr>
-          <a:xfrm>
-            <a:off x="274320" y="274320"/>
-            <a:ext cx="6309360" cy="6309360"/>
+        </p:nvPicPr>
+        <p:blipFill>
+          <a:blip r:embed="rId2"/>
+          <a:stretch>
+            <a:fillRect/>
+          </a:stretch>
+        </p:blipFill>
+        <p:spPr>
+          <a:xfrm>
+            <a:off x="0" y="0"/>
+            <a:ext cx="6858000" cy="6858000"/>
           </a:xfrm>
           <a:prstGeom prst="rect">
             <a:avLst/>
           </a:prstGeom>
-          <a:noFill/>
-          <a:ln w="38100">
-            <a:solidFill>
-              <a:srgbClr val="995229"/>
-            </a:solidFill>
-          </a:ln>
-        </p:spPr>
-        <p:txBody>
-          <a:bodyPr rtlCol="0" anchor="ctr"/>
-          <a:lstStyle/>
-          <a:p>
-            <a:pPr algn="ctr"/>
-          </a:p>
-        </p:txBody>
-      </p:sp>
-      <p:sp>
-        <p:nvSpPr>
-          <p:cNvPr id="4" name="장식"/>
-          <p:cNvSpPr/>
-          <p:nvPr/>
-        </p:nvSpPr>
-        <p:spPr>
-          <a:xfrm>
-            <a:off x="457200" y="457200"/>
-            <a:ext cx="5943600" cy="5943600"/>
-          </a:xfrm>
-          <a:prstGeom prst="rect">
-            <a:avLst/>
-          </a:prstGeom>
-          <a:noFill/>
-          <a:ln w="12700">
-            <a:solidFill>
-              <a:srgbClr val="F4DBCD"/>
-            </a:solidFill>
-          </a:ln>
-        </p:spPr>
-        <p:txBody>
-          <a:bodyPr rtlCol="0" anchor="ctr"/>
-          <a:lstStyle/>
-          <a:p>
-            <a:pPr algn="ctr"/>
-          </a:p>
-        </p:txBody>
-      </p:sp>
-      <p:sp>
-        <p:nvSpPr>
-          <p:cNvPr id="5" name="장식"/>
-          <p:cNvSpPr/>
-          <p:nvPr/>
-        </p:nvSpPr>
-        <p:spPr>
-          <a:xfrm>
-            <a:off x="3187517" y="780551"/>
-            <a:ext cx="333470" cy="333470"/>
-          </a:xfrm>
-          <a:prstGeom prst="ellipse">
-            <a:avLst/>
-          </a:prstGeom>
-          <a:solidFill>
-            <a:srgbClr val="995229"/>
-          </a:solidFill>
-          <a:ln>
-            <a:noFill/>
-          </a:ln>
-        </p:spPr>
-        <p:txBody>
-          <a:bodyPr rtlCol="0" anchor="ctr"/>
-          <a:lstStyle/>
-          <a:p>
-            <a:pPr algn="ctr"/>
-          </a:p>
-        </p:txBody>
-      </p:sp>
-      <p:sp>
-        <p:nvSpPr>
-          <p:cNvPr id="6" name="장식"/>
-          <p:cNvSpPr/>
-          <p:nvPr/>
-        </p:nvSpPr>
-        <p:spPr>
-          <a:xfrm>
-            <a:off x="4225213" y="1623191"/>
-            <a:ext cx="200163" cy="200163"/>
-          </a:xfrm>
-          <a:prstGeom prst="ellipse">
-            <a:avLst/>
-          </a:prstGeom>
-          <a:solidFill>
-            <a:srgbClr val="F4DBCD"/>
-          </a:solidFill>
-          <a:ln>
-            <a:noFill/>
-          </a:ln>
-        </p:spPr>
-        <p:txBody>
-          <a:bodyPr rtlCol="0" anchor="ctr"/>
-          <a:lstStyle/>
-          <a:p>
-            <a:pPr algn="ctr"/>
-          </a:p>
-        </p:txBody>
-      </p:sp>
-      <p:sp>
-        <p:nvSpPr>
-          <p:cNvPr id="7" name="장식"/>
-          <p:cNvSpPr/>
-          <p:nvPr/>
-        </p:nvSpPr>
-        <p:spPr>
-          <a:xfrm>
-            <a:off x="2453241" y="1161505"/>
-            <a:ext cx="263527" cy="263527"/>
-          </a:xfrm>
-          <a:prstGeom prst="ellipse">
-            <a:avLst/>
-          </a:prstGeom>
-          <a:solidFill>
-            <a:srgbClr val="3B9185"/>
-          </a:solidFill>
-          <a:ln>
-            <a:noFill/>
-          </a:ln>
-        </p:spPr>
-        <p:txBody>
-          <a:bodyPr rtlCol="0" anchor="ctr"/>
-          <a:lstStyle/>
-          <a:p>
-            <a:pPr algn="ctr"/>
-          </a:p>
-        </p:txBody>
-      </p:sp>
-      <p:sp>
-        <p:nvSpPr>
-          <p:cNvPr id="8" name="장식"/>
-          <p:cNvSpPr/>
-          <p:nvPr/>
-        </p:nvSpPr>
-        <p:spPr>
-          <a:xfrm>
-            <a:off x="3698011" y="758859"/>
-            <a:ext cx="216496" cy="216496"/>
-          </a:xfrm>
-          <a:prstGeom prst="ellipse">
-            <a:avLst/>
-          </a:prstGeom>
-          <a:solidFill>
-            <a:srgbClr val="995229"/>
-          </a:solidFill>
-          <a:ln>
-            <a:noFill/>
-          </a:ln>
-        </p:spPr>
-        <p:txBody>
-          <a:bodyPr rtlCol="0" anchor="ctr"/>
-          <a:lstStyle/>
-          <a:p>
-            <a:pPr algn="ctr"/>
-          </a:p>
-        </p:txBody>
-      </p:sp>
-      <p:sp>
-        <p:nvSpPr>
-          <p:cNvPr id="9" name="장식"/>
-          <p:cNvSpPr/>
-          <p:nvPr/>
-        </p:nvSpPr>
-        <p:spPr>
-          <a:xfrm>
-            <a:off x="3401698" y="360190"/>
-            <a:ext cx="334832" cy="334832"/>
-          </a:xfrm>
-          <a:prstGeom prst="ellipse">
-            <a:avLst/>
-          </a:prstGeom>
-          <a:solidFill>
-            <a:srgbClr val="F4DBCD"/>
-          </a:solidFill>
-          <a:ln>
-            <a:noFill/>
-          </a:ln>
-        </p:spPr>
-        <p:txBody>
-          <a:bodyPr rtlCol="0" anchor="ctr"/>
-          <a:lstStyle/>
-          <a:p>
-            <a:pPr algn="ctr"/>
-          </a:p>
-        </p:txBody>
-      </p:sp>
-      <p:sp>
-        <p:nvSpPr>
-          <p:cNvPr id="10" name="장식"/>
-          <p:cNvSpPr/>
-          <p:nvPr/>
-        </p:nvSpPr>
-        <p:spPr>
-          <a:xfrm>
-            <a:off x="2770553" y="825259"/>
-            <a:ext cx="143688" cy="143688"/>
-          </a:xfrm>
-          <a:prstGeom prst="ellipse">
-            <a:avLst/>
-          </a:prstGeom>
-          <a:solidFill>
-            <a:srgbClr val="3B9185"/>
-          </a:solidFill>
-          <a:ln>
-            <a:noFill/>
-          </a:ln>
-        </p:spPr>
-        <p:txBody>
-          <a:bodyPr rtlCol="0" anchor="ctr"/>
-          <a:lstStyle/>
-          <a:p>
-            <a:pPr algn="ctr"/>
-          </a:p>
-        </p:txBody>
-      </p:sp>
-      <p:sp>
-        <p:nvSpPr>
-          <p:cNvPr id="11" name="장식"/>
-          <p:cNvSpPr/>
-          <p:nvPr/>
-        </p:nvSpPr>
-        <p:spPr>
-          <a:xfrm>
-            <a:off x="3883770" y="2104327"/>
-            <a:ext cx="285402" cy="285402"/>
-          </a:xfrm>
-          <a:prstGeom prst="ellipse">
-            <a:avLst/>
-          </a:prstGeom>
-          <a:solidFill>
-            <a:srgbClr val="995229"/>
-          </a:solidFill>
-          <a:ln>
-            <a:noFill/>
-          </a:ln>
-        </p:spPr>
-        <p:txBody>
-          <a:bodyPr rtlCol="0" anchor="ctr"/>
-          <a:lstStyle/>
-          <a:p>
-            <a:pPr algn="ctr"/>
-          </a:p>
-        </p:txBody>
-      </p:sp>
-      <p:sp>
-        <p:nvSpPr>
-          <p:cNvPr id="12" name="장식"/>
-          <p:cNvSpPr/>
-          <p:nvPr/>
-        </p:nvSpPr>
-        <p:spPr>
-          <a:xfrm>
-            <a:off x="3448822" y="917740"/>
-            <a:ext cx="267797" cy="267797"/>
-          </a:xfrm>
-          <a:prstGeom prst="ellipse">
-            <a:avLst/>
-          </a:prstGeom>
-          <a:solidFill>
-            <a:srgbClr val="F4DBCD"/>
-          </a:solidFill>
-          <a:ln>
-            <a:noFill/>
-          </a:ln>
-        </p:spPr>
-        <p:txBody>
-          <a:bodyPr rtlCol="0" anchor="ctr"/>
-          <a:lstStyle/>
-          <a:p>
-            <a:pPr algn="ctr"/>
-          </a:p>
-        </p:txBody>
-      </p:sp>
-      <p:sp>
-        <p:nvSpPr>
-          <p:cNvPr id="13" name="장식"/>
-          <p:cNvSpPr/>
-          <p:nvPr/>
-        </p:nvSpPr>
-        <p:spPr>
-          <a:xfrm>
-            <a:off x="3975393" y="1444838"/>
-            <a:ext cx="284342" cy="284342"/>
-          </a:xfrm>
-          <a:prstGeom prst="ellipse">
-            <a:avLst/>
-          </a:prstGeom>
-          <a:solidFill>
-            <a:srgbClr val="3B9185"/>
-          </a:solidFill>
-          <a:ln>
-            <a:noFill/>
-          </a:ln>
-        </p:spPr>
-        <p:txBody>
-          <a:bodyPr rtlCol="0" anchor="ctr"/>
-          <a:lstStyle/>
-          <a:p>
-            <a:pPr algn="ctr"/>
-          </a:p>
-        </p:txBody>
-      </p:sp>
-      <p:sp>
-        <p:nvSpPr>
-          <p:cNvPr id="14" name="장식"/>
-          <p:cNvSpPr/>
-          <p:nvPr/>
-        </p:nvSpPr>
-        <p:spPr>
-          <a:xfrm>
-            <a:off x="2894909" y="750724"/>
-            <a:ext cx="180660" cy="180660"/>
-          </a:xfrm>
-          <a:prstGeom prst="ellipse">
-            <a:avLst/>
-          </a:prstGeom>
-          <a:solidFill>
-            <a:srgbClr val="995229"/>
-          </a:solidFill>
-          <a:ln>
-            <a:noFill/>
-          </a:ln>
-        </p:spPr>
-        <p:txBody>
-          <a:bodyPr rtlCol="0" anchor="ctr"/>
-          <a:lstStyle/>
-          <a:p>
-            <a:pPr algn="ctr"/>
-          </a:p>
-        </p:txBody>
-      </p:sp>
-      <p:sp>
-        <p:nvSpPr>
-          <p:cNvPr id="15" name="장식"/>
-          <p:cNvSpPr/>
-          <p:nvPr/>
-        </p:nvSpPr>
-        <p:spPr>
-          <a:xfrm>
-            <a:off x="2612256" y="941758"/>
-            <a:ext cx="124614" cy="124614"/>
-          </a:xfrm>
-          <a:prstGeom prst="ellipse">
-            <a:avLst/>
-          </a:prstGeom>
-          <a:solidFill>
-            <a:srgbClr val="F4DBCD"/>
-          </a:solidFill>
-          <a:ln>
-            <a:noFill/>
-          </a:ln>
-        </p:spPr>
-        <p:txBody>
-          <a:bodyPr rtlCol="0" anchor="ctr"/>
-          <a:lstStyle/>
-          <a:p>
-            <a:pPr algn="ctr"/>
-          </a:p>
-        </p:txBody>
-      </p:sp>
+        </p:spPr>
+      </p:pic>
       <p:sp>
         <p:nvSpPr>
           <p:cNvPr id="2" name="Title 1"/>
@@ -3691,8 +3330,8 @@
         </p:nvSpPr>
         <p:spPr>
           <a:xfrm>
-            <a:off x="822959" y="2331720"/>
-            <a:ext cx="5212080" cy="1371600"/>
+            <a:off x="685800" y="960120"/>
+            <a:ext cx="5486400" cy="1463040"/>
           </a:xfrm>
         </p:spPr>
         <p:txBody>
@@ -3701,7 +3340,7 @@
           </a:bodyPr>
           <a:lstStyle/>
           <a:p>
-            <a:pPr algn="ctr">
+            <a:pPr algn="l">
               <a:lnSpc>
                 <a:spcPct val="105000"/>
               </a:lnSpc>
@@ -3712,21 +3351,21 @@
                   <a:srgbClr val="492713"/>
                 </a:solidFill>
               </a:rPr>
-              <a:t>군고구마 같은 따뜻한 말</a:t>
-            </a:r>
-          </a:p>
-        </p:txBody>
-      </p:sp>
-      <p:sp>
-        <p:nvSpPr>
-          <p:cNvPr id="16" name="한 줄 문구"/>
+              <a:t>첫서리 오기 전에 할 일</a:t>
+            </a:r>
+          </a:p>
+        </p:txBody>
+      </p:sp>
+      <p:sp>
+        <p:nvSpPr>
+          <p:cNvPr id="4" name="한 줄 문구"/>
           <p:cNvSpPr txBox="1"/>
           <p:nvPr/>
         </p:nvSpPr>
         <p:spPr>
           <a:xfrm>
-            <a:off x="822959" y="3794760"/>
-            <a:ext cx="5212080" cy="822960"/>
+            <a:off x="685800" y="2560320"/>
+            <a:ext cx="5486400" cy="822960"/>
           </a:xfrm>
           <a:prstGeom prst="rect">
             <a:avLst/>
@@ -3739,7 +3378,7 @@
           </a:bodyPr>
           <a:lstStyle/>
           <a:p>
-            <a:pPr algn="ctr">
+            <a:pPr algn="l">
               <a:lnSpc>
                 <a:spcPct val="115000"/>
               </a:lnSpc>
@@ -3757,14 +3396,14 @@
       </p:sp>
       <p:sp>
         <p:nvSpPr>
-          <p:cNvPr id="17" name="안내 문구"/>
+          <p:cNvPr id="5" name="안내 문구"/>
           <p:cNvSpPr txBox="1"/>
           <p:nvPr/>
         </p:nvSpPr>
         <p:spPr>
           <a:xfrm>
-            <a:off x="822959" y="4663440"/>
-            <a:ext cx="5212080" cy="914400"/>
+            <a:off x="685800" y="3429000"/>
+            <a:ext cx="5486400" cy="914400"/>
           </a:xfrm>
           <a:prstGeom prst="rect">
             <a:avLst/>
@@ -3777,7 +3416,7 @@
           </a:bodyPr>
           <a:lstStyle/>
           <a:p>
-            <a:pPr algn="ctr">
+            <a:pPr algn="l">
               <a:lnSpc>
                 <a:spcPct val="115000"/>
               </a:lnSpc>
@@ -3879,325 +3518,6 @@
       </p:sp>
       <p:sp>
         <p:nvSpPr>
-          <p:cNvPr id="5" name="장식"/>
-          <p:cNvSpPr/>
-          <p:nvPr/>
-        </p:nvSpPr>
-        <p:spPr>
-          <a:xfrm>
-            <a:off x="5580842" y="631759"/>
-            <a:ext cx="185261" cy="185261"/>
-          </a:xfrm>
-          <a:prstGeom prst="ellipse">
-            <a:avLst/>
-          </a:prstGeom>
-          <a:solidFill>
-            <a:srgbClr val="995229"/>
-          </a:solidFill>
-          <a:ln>
-            <a:noFill/>
-          </a:ln>
-        </p:spPr>
-        <p:txBody>
-          <a:bodyPr rtlCol="0" anchor="ctr"/>
-          <a:lstStyle/>
-          <a:p>
-            <a:pPr algn="ctr"/>
-          </a:p>
-        </p:txBody>
-      </p:sp>
-      <p:sp>
-        <p:nvSpPr>
-          <p:cNvPr id="6" name="장식"/>
-          <p:cNvSpPr/>
-          <p:nvPr/>
-        </p:nvSpPr>
-        <p:spPr>
-          <a:xfrm>
-            <a:off x="6157340" y="1099893"/>
-            <a:ext cx="111201" cy="111201"/>
-          </a:xfrm>
-          <a:prstGeom prst="ellipse">
-            <a:avLst/>
-          </a:prstGeom>
-          <a:solidFill>
-            <a:srgbClr val="F4DBCD"/>
-          </a:solidFill>
-          <a:ln>
-            <a:noFill/>
-          </a:ln>
-        </p:spPr>
-        <p:txBody>
-          <a:bodyPr rtlCol="0" anchor="ctr"/>
-          <a:lstStyle/>
-          <a:p>
-            <a:pPr algn="ctr"/>
-          </a:p>
-        </p:txBody>
-      </p:sp>
-      <p:sp>
-        <p:nvSpPr>
-          <p:cNvPr id="7" name="장식"/>
-          <p:cNvSpPr/>
-          <p:nvPr/>
-        </p:nvSpPr>
-        <p:spPr>
-          <a:xfrm>
-            <a:off x="5172911" y="843400"/>
-            <a:ext cx="146404" cy="146404"/>
-          </a:xfrm>
-          <a:prstGeom prst="ellipse">
-            <a:avLst/>
-          </a:prstGeom>
-          <a:solidFill>
-            <a:srgbClr val="3B9185"/>
-          </a:solidFill>
-          <a:ln>
-            <a:noFill/>
-          </a:ln>
-        </p:spPr>
-        <p:txBody>
-          <a:bodyPr rtlCol="0" anchor="ctr"/>
-          <a:lstStyle/>
-          <a:p>
-            <a:pPr algn="ctr"/>
-          </a:p>
-        </p:txBody>
-      </p:sp>
-      <p:sp>
-        <p:nvSpPr>
-          <p:cNvPr id="8" name="장식"/>
-          <p:cNvSpPr/>
-          <p:nvPr/>
-        </p:nvSpPr>
-        <p:spPr>
-          <a:xfrm>
-            <a:off x="5864451" y="619708"/>
-            <a:ext cx="120275" cy="120275"/>
-          </a:xfrm>
-          <a:prstGeom prst="ellipse">
-            <a:avLst/>
-          </a:prstGeom>
-          <a:solidFill>
-            <a:srgbClr val="995229"/>
-          </a:solidFill>
-          <a:ln>
-            <a:noFill/>
-          </a:ln>
-        </p:spPr>
-        <p:txBody>
-          <a:bodyPr rtlCol="0" anchor="ctr"/>
-          <a:lstStyle/>
-          <a:p>
-            <a:pPr algn="ctr"/>
-          </a:p>
-        </p:txBody>
-      </p:sp>
-      <p:sp>
-        <p:nvSpPr>
-          <p:cNvPr id="9" name="장식"/>
-          <p:cNvSpPr/>
-          <p:nvPr/>
-        </p:nvSpPr>
-        <p:spPr>
-          <a:xfrm>
-            <a:off x="5699832" y="398225"/>
-            <a:ext cx="186017" cy="186017"/>
-          </a:xfrm>
-          <a:prstGeom prst="ellipse">
-            <a:avLst/>
-          </a:prstGeom>
-          <a:solidFill>
-            <a:srgbClr val="F4DBCD"/>
-          </a:solidFill>
-          <a:ln>
-            <a:noFill/>
-          </a:ln>
-        </p:spPr>
-        <p:txBody>
-          <a:bodyPr rtlCol="0" anchor="ctr"/>
-          <a:lstStyle/>
-          <a:p>
-            <a:pPr algn="ctr"/>
-          </a:p>
-        </p:txBody>
-      </p:sp>
-      <p:sp>
-        <p:nvSpPr>
-          <p:cNvPr id="10" name="장식"/>
-          <p:cNvSpPr/>
-          <p:nvPr/>
-        </p:nvSpPr>
-        <p:spPr>
-          <a:xfrm>
-            <a:off x="5349196" y="656597"/>
-            <a:ext cx="79826" cy="79826"/>
-          </a:xfrm>
-          <a:prstGeom prst="ellipse">
-            <a:avLst/>
-          </a:prstGeom>
-          <a:solidFill>
-            <a:srgbClr val="3B9185"/>
-          </a:solidFill>
-          <a:ln>
-            <a:noFill/>
-          </a:ln>
-        </p:spPr>
-        <p:txBody>
-          <a:bodyPr rtlCol="0" anchor="ctr"/>
-          <a:lstStyle/>
-          <a:p>
-            <a:pPr algn="ctr"/>
-          </a:p>
-        </p:txBody>
-      </p:sp>
-      <p:sp>
-        <p:nvSpPr>
-          <p:cNvPr id="11" name="장식"/>
-          <p:cNvSpPr/>
-          <p:nvPr/>
-        </p:nvSpPr>
-        <p:spPr>
-          <a:xfrm>
-            <a:off x="5967650" y="1367190"/>
-            <a:ext cx="158557" cy="158557"/>
-          </a:xfrm>
-          <a:prstGeom prst="ellipse">
-            <a:avLst/>
-          </a:prstGeom>
-          <a:solidFill>
-            <a:srgbClr val="995229"/>
-          </a:solidFill>
-          <a:ln>
-            <a:noFill/>
-          </a:ln>
-        </p:spPr>
-        <p:txBody>
-          <a:bodyPr rtlCol="0" anchor="ctr"/>
-          <a:lstStyle/>
-          <a:p>
-            <a:pPr algn="ctr"/>
-          </a:p>
-        </p:txBody>
-      </p:sp>
-      <p:sp>
-        <p:nvSpPr>
-          <p:cNvPr id="12" name="장식"/>
-          <p:cNvSpPr/>
-          <p:nvPr/>
-        </p:nvSpPr>
-        <p:spPr>
-          <a:xfrm>
-            <a:off x="5726012" y="707976"/>
-            <a:ext cx="148776" cy="148776"/>
-          </a:xfrm>
-          <a:prstGeom prst="ellipse">
-            <a:avLst/>
-          </a:prstGeom>
-          <a:solidFill>
-            <a:srgbClr val="F4DBCD"/>
-          </a:solidFill>
-          <a:ln>
-            <a:noFill/>
-          </a:ln>
-        </p:spPr>
-        <p:txBody>
-          <a:bodyPr rtlCol="0" anchor="ctr"/>
-          <a:lstStyle/>
-          <a:p>
-            <a:pPr algn="ctr"/>
-          </a:p>
-        </p:txBody>
-      </p:sp>
-      <p:sp>
-        <p:nvSpPr>
-          <p:cNvPr id="13" name="장식"/>
-          <p:cNvSpPr/>
-          <p:nvPr/>
-        </p:nvSpPr>
-        <p:spPr>
-          <a:xfrm>
-            <a:off x="6018551" y="1000807"/>
-            <a:ext cx="157967" cy="157967"/>
-          </a:xfrm>
-          <a:prstGeom prst="ellipse">
-            <a:avLst/>
-          </a:prstGeom>
-          <a:solidFill>
-            <a:srgbClr val="3B9185"/>
-          </a:solidFill>
-          <a:ln>
-            <a:noFill/>
-          </a:ln>
-        </p:spPr>
-        <p:txBody>
-          <a:bodyPr rtlCol="0" anchor="ctr"/>
-          <a:lstStyle/>
-          <a:p>
-            <a:pPr algn="ctr"/>
-          </a:p>
-        </p:txBody>
-      </p:sp>
-      <p:sp>
-        <p:nvSpPr>
-          <p:cNvPr id="14" name="장식"/>
-          <p:cNvSpPr/>
-          <p:nvPr/>
-        </p:nvSpPr>
-        <p:spPr>
-          <a:xfrm>
-            <a:off x="5418283" y="615189"/>
-            <a:ext cx="100367" cy="100367"/>
-          </a:xfrm>
-          <a:prstGeom prst="ellipse">
-            <a:avLst/>
-          </a:prstGeom>
-          <a:solidFill>
-            <a:srgbClr val="995229"/>
-          </a:solidFill>
-          <a:ln>
-            <a:noFill/>
-          </a:ln>
-        </p:spPr>
-        <p:txBody>
-          <a:bodyPr rtlCol="0" anchor="ctr"/>
-          <a:lstStyle/>
-          <a:p>
-            <a:pPr algn="ctr"/>
-          </a:p>
-        </p:txBody>
-      </p:sp>
-      <p:sp>
-        <p:nvSpPr>
-          <p:cNvPr id="15" name="장식"/>
-          <p:cNvSpPr/>
-          <p:nvPr/>
-        </p:nvSpPr>
-        <p:spPr>
-          <a:xfrm>
-            <a:off x="5261253" y="721318"/>
-            <a:ext cx="69230" cy="69230"/>
-          </a:xfrm>
-          <a:prstGeom prst="ellipse">
-            <a:avLst/>
-          </a:prstGeom>
-          <a:solidFill>
-            <a:srgbClr val="F4DBCD"/>
-          </a:solidFill>
-          <a:ln>
-            <a:noFill/>
-          </a:ln>
-        </p:spPr>
-        <p:txBody>
-          <a:bodyPr rtlCol="0" anchor="ctr"/>
-          <a:lstStyle/>
-          <a:p>
-            <a:pPr algn="ctr"/>
-          </a:p>
-        </p:txBody>
-      </p:sp>
-      <p:sp>
-        <p:nvSpPr>
           <p:cNvPr id="2" name="Title 1"/>
           <p:cNvSpPr>
             <a:spLocks noGrp="1"/>
@@ -4236,7 +3556,7 @@
       </p:sp>
       <p:sp>
         <p:nvSpPr>
-          <p:cNvPr id="16" name="번호"/>
+          <p:cNvPr id="5" name="번호"/>
           <p:cNvSpPr txBox="1"/>
           <p:nvPr/>
         </p:nvSpPr>
@@ -4274,7 +3594,7 @@
       </p:sp>
       <p:sp>
         <p:nvSpPr>
-          <p:cNvPr id="17" name="본문"/>
+          <p:cNvPr id="6" name="본문"/>
           <p:cNvSpPr txBox="1"/>
           <p:nvPr/>
         </p:nvSpPr>
@@ -4312,7 +3632,7 @@
       </p:sp>
       <p:sp>
         <p:nvSpPr>
-          <p:cNvPr id="18" name="쪽 번호"/>
+          <p:cNvPr id="7" name="쪽 번호"/>
           <p:cNvSpPr txBox="1"/>
           <p:nvPr/>
         </p:nvSpPr>
@@ -4434,325 +3754,6 @@
       </p:sp>
       <p:sp>
         <p:nvSpPr>
-          <p:cNvPr id="5" name="장식"/>
-          <p:cNvSpPr/>
-          <p:nvPr/>
-        </p:nvSpPr>
-        <p:spPr>
-          <a:xfrm>
-            <a:off x="5580842" y="631759"/>
-            <a:ext cx="185261" cy="185261"/>
-          </a:xfrm>
-          <a:prstGeom prst="ellipse">
-            <a:avLst/>
-          </a:prstGeom>
-          <a:solidFill>
-            <a:srgbClr val="995229"/>
-          </a:solidFill>
-          <a:ln>
-            <a:noFill/>
-          </a:ln>
-        </p:spPr>
-        <p:txBody>
-          <a:bodyPr rtlCol="0" anchor="ctr"/>
-          <a:lstStyle/>
-          <a:p>
-            <a:pPr algn="ctr"/>
-          </a:p>
-        </p:txBody>
-      </p:sp>
-      <p:sp>
-        <p:nvSpPr>
-          <p:cNvPr id="6" name="장식"/>
-          <p:cNvSpPr/>
-          <p:nvPr/>
-        </p:nvSpPr>
-        <p:spPr>
-          <a:xfrm>
-            <a:off x="6157340" y="1099893"/>
-            <a:ext cx="111201" cy="111201"/>
-          </a:xfrm>
-          <a:prstGeom prst="ellipse">
-            <a:avLst/>
-          </a:prstGeom>
-          <a:solidFill>
-            <a:srgbClr val="F4DBCD"/>
-          </a:solidFill>
-          <a:ln>
-            <a:noFill/>
-          </a:ln>
-        </p:spPr>
-        <p:txBody>
-          <a:bodyPr rtlCol="0" anchor="ctr"/>
-          <a:lstStyle/>
-          <a:p>
-            <a:pPr algn="ctr"/>
-          </a:p>
-        </p:txBody>
-      </p:sp>
-      <p:sp>
-        <p:nvSpPr>
-          <p:cNvPr id="7" name="장식"/>
-          <p:cNvSpPr/>
-          <p:nvPr/>
-        </p:nvSpPr>
-        <p:spPr>
-          <a:xfrm>
-            <a:off x="5172911" y="843400"/>
-            <a:ext cx="146404" cy="146404"/>
-          </a:xfrm>
-          <a:prstGeom prst="ellipse">
-            <a:avLst/>
-          </a:prstGeom>
-          <a:solidFill>
-            <a:srgbClr val="3B9185"/>
-          </a:solidFill>
-          <a:ln>
-            <a:noFill/>
-          </a:ln>
-        </p:spPr>
-        <p:txBody>
-          <a:bodyPr rtlCol="0" anchor="ctr"/>
-          <a:lstStyle/>
-          <a:p>
-            <a:pPr algn="ctr"/>
-          </a:p>
-        </p:txBody>
-      </p:sp>
-      <p:sp>
-        <p:nvSpPr>
-          <p:cNvPr id="8" name="장식"/>
-          <p:cNvSpPr/>
-          <p:nvPr/>
-        </p:nvSpPr>
-        <p:spPr>
-          <a:xfrm>
-            <a:off x="5864451" y="619708"/>
-            <a:ext cx="120275" cy="120275"/>
-          </a:xfrm>
-          <a:prstGeom prst="ellipse">
-            <a:avLst/>
-          </a:prstGeom>
-          <a:solidFill>
-            <a:srgbClr val="995229"/>
-          </a:solidFill>
-          <a:ln>
-            <a:noFill/>
-          </a:ln>
-        </p:spPr>
-        <p:txBody>
-          <a:bodyPr rtlCol="0" anchor="ctr"/>
-          <a:lstStyle/>
-          <a:p>
-            <a:pPr algn="ctr"/>
-          </a:p>
-        </p:txBody>
-      </p:sp>
-      <p:sp>
-        <p:nvSpPr>
-          <p:cNvPr id="9" name="장식"/>
-          <p:cNvSpPr/>
-          <p:nvPr/>
-        </p:nvSpPr>
-        <p:spPr>
-          <a:xfrm>
-            <a:off x="5699832" y="398225"/>
-            <a:ext cx="186017" cy="186017"/>
-          </a:xfrm>
-          <a:prstGeom prst="ellipse">
-            <a:avLst/>
-          </a:prstGeom>
-          <a:solidFill>
-            <a:srgbClr val="F4DBCD"/>
-          </a:solidFill>
-          <a:ln>
-            <a:noFill/>
-          </a:ln>
-        </p:spPr>
-        <p:txBody>
-          <a:bodyPr rtlCol="0" anchor="ctr"/>
-          <a:lstStyle/>
-          <a:p>
-            <a:pPr algn="ctr"/>
-          </a:p>
-        </p:txBody>
-      </p:sp>
-      <p:sp>
-        <p:nvSpPr>
-          <p:cNvPr id="10" name="장식"/>
-          <p:cNvSpPr/>
-          <p:nvPr/>
-        </p:nvSpPr>
-        <p:spPr>
-          <a:xfrm>
-            <a:off x="5349196" y="656597"/>
-            <a:ext cx="79826" cy="79826"/>
-          </a:xfrm>
-          <a:prstGeom prst="ellipse">
-            <a:avLst/>
-          </a:prstGeom>
-          <a:solidFill>
-            <a:srgbClr val="3B9185"/>
-          </a:solidFill>
-          <a:ln>
-            <a:noFill/>
-          </a:ln>
-        </p:spPr>
-        <p:txBody>
-          <a:bodyPr rtlCol="0" anchor="ctr"/>
-          <a:lstStyle/>
-          <a:p>
-            <a:pPr algn="ctr"/>
-          </a:p>
-        </p:txBody>
-      </p:sp>
-      <p:sp>
-        <p:nvSpPr>
-          <p:cNvPr id="11" name="장식"/>
-          <p:cNvSpPr/>
-          <p:nvPr/>
-        </p:nvSpPr>
-        <p:spPr>
-          <a:xfrm>
-            <a:off x="5967650" y="1367190"/>
-            <a:ext cx="158557" cy="158557"/>
-          </a:xfrm>
-          <a:prstGeom prst="ellipse">
-            <a:avLst/>
-          </a:prstGeom>
-          <a:solidFill>
-            <a:srgbClr val="995229"/>
-          </a:solidFill>
-          <a:ln>
-            <a:noFill/>
-          </a:ln>
-        </p:spPr>
-        <p:txBody>
-          <a:bodyPr rtlCol="0" anchor="ctr"/>
-          <a:lstStyle/>
-          <a:p>
-            <a:pPr algn="ctr"/>
-          </a:p>
-        </p:txBody>
-      </p:sp>
-      <p:sp>
-        <p:nvSpPr>
-          <p:cNvPr id="12" name="장식"/>
-          <p:cNvSpPr/>
-          <p:nvPr/>
-        </p:nvSpPr>
-        <p:spPr>
-          <a:xfrm>
-            <a:off x="5726012" y="707976"/>
-            <a:ext cx="148776" cy="148776"/>
-          </a:xfrm>
-          <a:prstGeom prst="ellipse">
-            <a:avLst/>
-          </a:prstGeom>
-          <a:solidFill>
-            <a:srgbClr val="F4DBCD"/>
-          </a:solidFill>
-          <a:ln>
-            <a:noFill/>
-          </a:ln>
-        </p:spPr>
-        <p:txBody>
-          <a:bodyPr rtlCol="0" anchor="ctr"/>
-          <a:lstStyle/>
-          <a:p>
-            <a:pPr algn="ctr"/>
-          </a:p>
-        </p:txBody>
-      </p:sp>
-      <p:sp>
-        <p:nvSpPr>
-          <p:cNvPr id="13" name="장식"/>
-          <p:cNvSpPr/>
-          <p:nvPr/>
-        </p:nvSpPr>
-        <p:spPr>
-          <a:xfrm>
-            <a:off x="6018551" y="1000807"/>
-            <a:ext cx="157967" cy="157967"/>
-          </a:xfrm>
-          <a:prstGeom prst="ellipse">
-            <a:avLst/>
-          </a:prstGeom>
-          <a:solidFill>
-            <a:srgbClr val="3B9185"/>
-          </a:solidFill>
-          <a:ln>
-            <a:noFill/>
-          </a:ln>
-        </p:spPr>
-        <p:txBody>
-          <a:bodyPr rtlCol="0" anchor="ctr"/>
-          <a:lstStyle/>
-          <a:p>
-            <a:pPr algn="ctr"/>
-          </a:p>
-        </p:txBody>
-      </p:sp>
-      <p:sp>
-        <p:nvSpPr>
-          <p:cNvPr id="14" name="장식"/>
-          <p:cNvSpPr/>
-          <p:nvPr/>
-        </p:nvSpPr>
-        <p:spPr>
-          <a:xfrm>
-            <a:off x="5418283" y="615189"/>
-            <a:ext cx="100367" cy="100367"/>
-          </a:xfrm>
-          <a:prstGeom prst="ellipse">
-            <a:avLst/>
-          </a:prstGeom>
-          <a:solidFill>
-            <a:srgbClr val="995229"/>
-          </a:solidFill>
-          <a:ln>
-            <a:noFill/>
-          </a:ln>
-        </p:spPr>
-        <p:txBody>
-          <a:bodyPr rtlCol="0" anchor="ctr"/>
-          <a:lstStyle/>
-          <a:p>
-            <a:pPr algn="ctr"/>
-          </a:p>
-        </p:txBody>
-      </p:sp>
-      <p:sp>
-        <p:nvSpPr>
-          <p:cNvPr id="15" name="장식"/>
-          <p:cNvSpPr/>
-          <p:nvPr/>
-        </p:nvSpPr>
-        <p:spPr>
-          <a:xfrm>
-            <a:off x="5261253" y="721318"/>
-            <a:ext cx="69230" cy="69230"/>
-          </a:xfrm>
-          <a:prstGeom prst="ellipse">
-            <a:avLst/>
-          </a:prstGeom>
-          <a:solidFill>
-            <a:srgbClr val="F4DBCD"/>
-          </a:solidFill>
-          <a:ln>
-            <a:noFill/>
-          </a:ln>
-        </p:spPr>
-        <p:txBody>
-          <a:bodyPr rtlCol="0" anchor="ctr"/>
-          <a:lstStyle/>
-          <a:p>
-            <a:pPr algn="ctr"/>
-          </a:p>
-        </p:txBody>
-      </p:sp>
-      <p:sp>
-        <p:nvSpPr>
           <p:cNvPr id="2" name="Title 1"/>
           <p:cNvSpPr>
             <a:spLocks noGrp="1"/>
@@ -4791,7 +3792,7 @@
       </p:sp>
       <p:sp>
         <p:nvSpPr>
-          <p:cNvPr id="16" name="번호"/>
+          <p:cNvPr id="5" name="번호"/>
           <p:cNvSpPr txBox="1"/>
           <p:nvPr/>
         </p:nvSpPr>
@@ -4829,7 +3830,7 @@
       </p:sp>
       <p:sp>
         <p:nvSpPr>
-          <p:cNvPr id="17" name="본문"/>
+          <p:cNvPr id="6" name="본문"/>
           <p:cNvSpPr txBox="1"/>
           <p:nvPr/>
         </p:nvSpPr>
@@ -4867,7 +3868,7 @@
       </p:sp>
       <p:sp>
         <p:nvSpPr>
-          <p:cNvPr id="18" name="쪽 번호"/>
+          <p:cNvPr id="7" name="쪽 번호"/>
           <p:cNvSpPr txBox="1"/>
           <p:nvPr/>
         </p:nvSpPr>
@@ -4989,325 +3990,6 @@
       </p:sp>
       <p:sp>
         <p:nvSpPr>
-          <p:cNvPr id="5" name="장식"/>
-          <p:cNvSpPr/>
-          <p:nvPr/>
-        </p:nvSpPr>
-        <p:spPr>
-          <a:xfrm>
-            <a:off x="5580842" y="631759"/>
-            <a:ext cx="185261" cy="185261"/>
-          </a:xfrm>
-          <a:prstGeom prst="ellipse">
-            <a:avLst/>
-          </a:prstGeom>
-          <a:solidFill>
-            <a:srgbClr val="995229"/>
-          </a:solidFill>
-          <a:ln>
-            <a:noFill/>
-          </a:ln>
-        </p:spPr>
-        <p:txBody>
-          <a:bodyPr rtlCol="0" anchor="ctr"/>
-          <a:lstStyle/>
-          <a:p>
-            <a:pPr algn="ctr"/>
-          </a:p>
-        </p:txBody>
-      </p:sp>
-      <p:sp>
-        <p:nvSpPr>
-          <p:cNvPr id="6" name="장식"/>
-          <p:cNvSpPr/>
-          <p:nvPr/>
-        </p:nvSpPr>
-        <p:spPr>
-          <a:xfrm>
-            <a:off x="6157340" y="1099893"/>
-            <a:ext cx="111201" cy="111201"/>
-          </a:xfrm>
-          <a:prstGeom prst="ellipse">
-            <a:avLst/>
-          </a:prstGeom>
-          <a:solidFill>
-            <a:srgbClr val="F4DBCD"/>
-          </a:solidFill>
-          <a:ln>
-            <a:noFill/>
-          </a:ln>
-        </p:spPr>
-        <p:txBody>
-          <a:bodyPr rtlCol="0" anchor="ctr"/>
-          <a:lstStyle/>
-          <a:p>
-            <a:pPr algn="ctr"/>
-          </a:p>
-        </p:txBody>
-      </p:sp>
-      <p:sp>
-        <p:nvSpPr>
-          <p:cNvPr id="7" name="장식"/>
-          <p:cNvSpPr/>
-          <p:nvPr/>
-        </p:nvSpPr>
-        <p:spPr>
-          <a:xfrm>
-            <a:off x="5172911" y="843400"/>
-            <a:ext cx="146404" cy="146404"/>
-          </a:xfrm>
-          <a:prstGeom prst="ellipse">
-            <a:avLst/>
-          </a:prstGeom>
-          <a:solidFill>
-            <a:srgbClr val="3B9185"/>
-          </a:solidFill>
-          <a:ln>
-            <a:noFill/>
-          </a:ln>
-        </p:spPr>
-        <p:txBody>
-          <a:bodyPr rtlCol="0" anchor="ctr"/>
-          <a:lstStyle/>
-          <a:p>
-            <a:pPr algn="ctr"/>
-          </a:p>
-        </p:txBody>
-      </p:sp>
-      <p:sp>
-        <p:nvSpPr>
-          <p:cNvPr id="8" name="장식"/>
-          <p:cNvSpPr/>
-          <p:nvPr/>
-        </p:nvSpPr>
-        <p:spPr>
-          <a:xfrm>
-            <a:off x="5864451" y="619708"/>
-            <a:ext cx="120275" cy="120275"/>
-          </a:xfrm>
-          <a:prstGeom prst="ellipse">
-            <a:avLst/>
-          </a:prstGeom>
-          <a:solidFill>
-            <a:srgbClr val="995229"/>
-          </a:solidFill>
-          <a:ln>
-            <a:noFill/>
-          </a:ln>
-        </p:spPr>
-        <p:txBody>
-          <a:bodyPr rtlCol="0" anchor="ctr"/>
-          <a:lstStyle/>
-          <a:p>
-            <a:pPr algn="ctr"/>
-          </a:p>
-        </p:txBody>
-      </p:sp>
-      <p:sp>
-        <p:nvSpPr>
-          <p:cNvPr id="9" name="장식"/>
-          <p:cNvSpPr/>
-          <p:nvPr/>
-        </p:nvSpPr>
-        <p:spPr>
-          <a:xfrm>
-            <a:off x="5699832" y="398225"/>
-            <a:ext cx="186017" cy="186017"/>
-          </a:xfrm>
-          <a:prstGeom prst="ellipse">
-            <a:avLst/>
-          </a:prstGeom>
-          <a:solidFill>
-            <a:srgbClr val="F4DBCD"/>
-          </a:solidFill>
-          <a:ln>
-            <a:noFill/>
-          </a:ln>
-        </p:spPr>
-        <p:txBody>
-          <a:bodyPr rtlCol="0" anchor="ctr"/>
-          <a:lstStyle/>
-          <a:p>
-            <a:pPr algn="ctr"/>
-          </a:p>
-        </p:txBody>
-      </p:sp>
-      <p:sp>
-        <p:nvSpPr>
-          <p:cNvPr id="10" name="장식"/>
-          <p:cNvSpPr/>
-          <p:nvPr/>
-        </p:nvSpPr>
-        <p:spPr>
-          <a:xfrm>
-            <a:off x="5349196" y="656597"/>
-            <a:ext cx="79826" cy="79826"/>
-          </a:xfrm>
-          <a:prstGeom prst="ellipse">
-            <a:avLst/>
-          </a:prstGeom>
-          <a:solidFill>
-            <a:srgbClr val="3B9185"/>
-          </a:solidFill>
-          <a:ln>
-            <a:noFill/>
-          </a:ln>
-        </p:spPr>
-        <p:txBody>
-          <a:bodyPr rtlCol="0" anchor="ctr"/>
-          <a:lstStyle/>
-          <a:p>
-            <a:pPr algn="ctr"/>
-          </a:p>
-        </p:txBody>
-      </p:sp>
-      <p:sp>
-        <p:nvSpPr>
-          <p:cNvPr id="11" name="장식"/>
-          <p:cNvSpPr/>
-          <p:nvPr/>
-        </p:nvSpPr>
-        <p:spPr>
-          <a:xfrm>
-            <a:off x="5967650" y="1367190"/>
-            <a:ext cx="158557" cy="158557"/>
-          </a:xfrm>
-          <a:prstGeom prst="ellipse">
-            <a:avLst/>
-          </a:prstGeom>
-          <a:solidFill>
-            <a:srgbClr val="995229"/>
-          </a:solidFill>
-          <a:ln>
-            <a:noFill/>
-          </a:ln>
-        </p:spPr>
-        <p:txBody>
-          <a:bodyPr rtlCol="0" anchor="ctr"/>
-          <a:lstStyle/>
-          <a:p>
-            <a:pPr algn="ctr"/>
-          </a:p>
-        </p:txBody>
-      </p:sp>
-      <p:sp>
-        <p:nvSpPr>
-          <p:cNvPr id="12" name="장식"/>
-          <p:cNvSpPr/>
-          <p:nvPr/>
-        </p:nvSpPr>
-        <p:spPr>
-          <a:xfrm>
-            <a:off x="5726012" y="707976"/>
-            <a:ext cx="148776" cy="148776"/>
-          </a:xfrm>
-          <a:prstGeom prst="ellipse">
-            <a:avLst/>
-          </a:prstGeom>
-          <a:solidFill>
-            <a:srgbClr val="F4DBCD"/>
-          </a:solidFill>
-          <a:ln>
-            <a:noFill/>
-          </a:ln>
-        </p:spPr>
-        <p:txBody>
-          <a:bodyPr rtlCol="0" anchor="ctr"/>
-          <a:lstStyle/>
-          <a:p>
-            <a:pPr algn="ctr"/>
-          </a:p>
-        </p:txBody>
-      </p:sp>
-      <p:sp>
-        <p:nvSpPr>
-          <p:cNvPr id="13" name="장식"/>
-          <p:cNvSpPr/>
-          <p:nvPr/>
-        </p:nvSpPr>
-        <p:spPr>
-          <a:xfrm>
-            <a:off x="6018551" y="1000807"/>
-            <a:ext cx="157967" cy="157967"/>
-          </a:xfrm>
-          <a:prstGeom prst="ellipse">
-            <a:avLst/>
-          </a:prstGeom>
-          <a:solidFill>
-            <a:srgbClr val="3B9185"/>
-          </a:solidFill>
-          <a:ln>
-            <a:noFill/>
-          </a:ln>
-        </p:spPr>
-        <p:txBody>
-          <a:bodyPr rtlCol="0" anchor="ctr"/>
-          <a:lstStyle/>
-          <a:p>
-            <a:pPr algn="ctr"/>
-          </a:p>
-        </p:txBody>
-      </p:sp>
-      <p:sp>
-        <p:nvSpPr>
-          <p:cNvPr id="14" name="장식"/>
-          <p:cNvSpPr/>
-          <p:nvPr/>
-        </p:nvSpPr>
-        <p:spPr>
-          <a:xfrm>
-            <a:off x="5418283" y="615189"/>
-            <a:ext cx="100367" cy="100367"/>
-          </a:xfrm>
-          <a:prstGeom prst="ellipse">
-            <a:avLst/>
-          </a:prstGeom>
-          <a:solidFill>
-            <a:srgbClr val="995229"/>
-          </a:solidFill>
-          <a:ln>
-            <a:noFill/>
-          </a:ln>
-        </p:spPr>
-        <p:txBody>
-          <a:bodyPr rtlCol="0" anchor="ctr"/>
-          <a:lstStyle/>
-          <a:p>
-            <a:pPr algn="ctr"/>
-          </a:p>
-        </p:txBody>
-      </p:sp>
-      <p:sp>
-        <p:nvSpPr>
-          <p:cNvPr id="15" name="장식"/>
-          <p:cNvSpPr/>
-          <p:nvPr/>
-        </p:nvSpPr>
-        <p:spPr>
-          <a:xfrm>
-            <a:off x="5261253" y="721318"/>
-            <a:ext cx="69230" cy="69230"/>
-          </a:xfrm>
-          <a:prstGeom prst="ellipse">
-            <a:avLst/>
-          </a:prstGeom>
-          <a:solidFill>
-            <a:srgbClr val="F4DBCD"/>
-          </a:solidFill>
-          <a:ln>
-            <a:noFill/>
-          </a:ln>
-        </p:spPr>
-        <p:txBody>
-          <a:bodyPr rtlCol="0" anchor="ctr"/>
-          <a:lstStyle/>
-          <a:p>
-            <a:pPr algn="ctr"/>
-          </a:p>
-        </p:txBody>
-      </p:sp>
-      <p:sp>
-        <p:nvSpPr>
           <p:cNvPr id="2" name="Title 1"/>
           <p:cNvSpPr>
             <a:spLocks noGrp="1"/>
@@ -5346,7 +4028,7 @@
       </p:sp>
       <p:sp>
         <p:nvSpPr>
-          <p:cNvPr id="16" name="번호"/>
+          <p:cNvPr id="5" name="번호"/>
           <p:cNvSpPr txBox="1"/>
           <p:nvPr/>
         </p:nvSpPr>
@@ -5384,7 +4066,7 @@
       </p:sp>
       <p:sp>
         <p:nvSpPr>
-          <p:cNvPr id="17" name="본문"/>
+          <p:cNvPr id="6" name="본문"/>
           <p:cNvSpPr txBox="1"/>
           <p:nvPr/>
         </p:nvSpPr>
@@ -5422,7 +4104,7 @@
       </p:sp>
       <p:sp>
         <p:nvSpPr>
-          <p:cNvPr id="18" name="쪽 번호"/>
+          <p:cNvPr id="7" name="쪽 번호"/>
           <p:cNvSpPr txBox="1"/>
           <p:nvPr/>
         </p:nvSpPr>
@@ -5544,325 +4226,6 @@
       </p:sp>
       <p:sp>
         <p:nvSpPr>
-          <p:cNvPr id="5" name="장식"/>
-          <p:cNvSpPr/>
-          <p:nvPr/>
-        </p:nvSpPr>
-        <p:spPr>
-          <a:xfrm>
-            <a:off x="5580842" y="631759"/>
-            <a:ext cx="185261" cy="185261"/>
-          </a:xfrm>
-          <a:prstGeom prst="ellipse">
-            <a:avLst/>
-          </a:prstGeom>
-          <a:solidFill>
-            <a:srgbClr val="995229"/>
-          </a:solidFill>
-          <a:ln>
-            <a:noFill/>
-          </a:ln>
-        </p:spPr>
-        <p:txBody>
-          <a:bodyPr rtlCol="0" anchor="ctr"/>
-          <a:lstStyle/>
-          <a:p>
-            <a:pPr algn="ctr"/>
-          </a:p>
-        </p:txBody>
-      </p:sp>
-      <p:sp>
-        <p:nvSpPr>
-          <p:cNvPr id="6" name="장식"/>
-          <p:cNvSpPr/>
-          <p:nvPr/>
-        </p:nvSpPr>
-        <p:spPr>
-          <a:xfrm>
-            <a:off x="6157340" y="1099893"/>
-            <a:ext cx="111201" cy="111201"/>
-          </a:xfrm>
-          <a:prstGeom prst="ellipse">
-            <a:avLst/>
-          </a:prstGeom>
-          <a:solidFill>
-            <a:srgbClr val="F4DBCD"/>
-          </a:solidFill>
-          <a:ln>
-            <a:noFill/>
-          </a:ln>
-        </p:spPr>
-        <p:txBody>
-          <a:bodyPr rtlCol="0" anchor="ctr"/>
-          <a:lstStyle/>
-          <a:p>
-            <a:pPr algn="ctr"/>
-          </a:p>
-        </p:txBody>
-      </p:sp>
-      <p:sp>
-        <p:nvSpPr>
-          <p:cNvPr id="7" name="장식"/>
-          <p:cNvSpPr/>
-          <p:nvPr/>
-        </p:nvSpPr>
-        <p:spPr>
-          <a:xfrm>
-            <a:off x="5172911" y="843400"/>
-            <a:ext cx="146404" cy="146404"/>
-          </a:xfrm>
-          <a:prstGeom prst="ellipse">
-            <a:avLst/>
-          </a:prstGeom>
-          <a:solidFill>
-            <a:srgbClr val="3B9185"/>
-          </a:solidFill>
-          <a:ln>
-            <a:noFill/>
-          </a:ln>
-        </p:spPr>
-        <p:txBody>
-          <a:bodyPr rtlCol="0" anchor="ctr"/>
-          <a:lstStyle/>
-          <a:p>
-            <a:pPr algn="ctr"/>
-          </a:p>
-        </p:txBody>
-      </p:sp>
-      <p:sp>
-        <p:nvSpPr>
-          <p:cNvPr id="8" name="장식"/>
-          <p:cNvSpPr/>
-          <p:nvPr/>
-        </p:nvSpPr>
-        <p:spPr>
-          <a:xfrm>
-            <a:off x="5864451" y="619708"/>
-            <a:ext cx="120275" cy="120275"/>
-          </a:xfrm>
-          <a:prstGeom prst="ellipse">
-            <a:avLst/>
-          </a:prstGeom>
-          <a:solidFill>
-            <a:srgbClr val="995229"/>
-          </a:solidFill>
-          <a:ln>
-            <a:noFill/>
-          </a:ln>
-        </p:spPr>
-        <p:txBody>
-          <a:bodyPr rtlCol="0" anchor="ctr"/>
-          <a:lstStyle/>
-          <a:p>
-            <a:pPr algn="ctr"/>
-          </a:p>
-        </p:txBody>
-      </p:sp>
-      <p:sp>
-        <p:nvSpPr>
-          <p:cNvPr id="9" name="장식"/>
-          <p:cNvSpPr/>
-          <p:nvPr/>
-        </p:nvSpPr>
-        <p:spPr>
-          <a:xfrm>
-            <a:off x="5699832" y="398225"/>
-            <a:ext cx="186017" cy="186017"/>
-          </a:xfrm>
-          <a:prstGeom prst="ellipse">
-            <a:avLst/>
-          </a:prstGeom>
-          <a:solidFill>
-            <a:srgbClr val="F4DBCD"/>
-          </a:solidFill>
-          <a:ln>
-            <a:noFill/>
-          </a:ln>
-        </p:spPr>
-        <p:txBody>
-          <a:bodyPr rtlCol="0" anchor="ctr"/>
-          <a:lstStyle/>
-          <a:p>
-            <a:pPr algn="ctr"/>
-          </a:p>
-        </p:txBody>
-      </p:sp>
-      <p:sp>
-        <p:nvSpPr>
-          <p:cNvPr id="10" name="장식"/>
-          <p:cNvSpPr/>
-          <p:nvPr/>
-        </p:nvSpPr>
-        <p:spPr>
-          <a:xfrm>
-            <a:off x="5349196" y="656597"/>
-            <a:ext cx="79826" cy="79826"/>
-          </a:xfrm>
-          <a:prstGeom prst="ellipse">
-            <a:avLst/>
-          </a:prstGeom>
-          <a:solidFill>
-            <a:srgbClr val="3B9185"/>
-          </a:solidFill>
-          <a:ln>
-            <a:noFill/>
-          </a:ln>
-        </p:spPr>
-        <p:txBody>
-          <a:bodyPr rtlCol="0" anchor="ctr"/>
-          <a:lstStyle/>
-          <a:p>
-            <a:pPr algn="ctr"/>
-          </a:p>
-        </p:txBody>
-      </p:sp>
-      <p:sp>
-        <p:nvSpPr>
-          <p:cNvPr id="11" name="장식"/>
-          <p:cNvSpPr/>
-          <p:nvPr/>
-        </p:nvSpPr>
-        <p:spPr>
-          <a:xfrm>
-            <a:off x="5967650" y="1367190"/>
-            <a:ext cx="158557" cy="158557"/>
-          </a:xfrm>
-          <a:prstGeom prst="ellipse">
-            <a:avLst/>
-          </a:prstGeom>
-          <a:solidFill>
-            <a:srgbClr val="995229"/>
-          </a:solidFill>
-          <a:ln>
-            <a:noFill/>
-          </a:ln>
-        </p:spPr>
-        <p:txBody>
-          <a:bodyPr rtlCol="0" anchor="ctr"/>
-          <a:lstStyle/>
-          <a:p>
-            <a:pPr algn="ctr"/>
-          </a:p>
-        </p:txBody>
-      </p:sp>
-      <p:sp>
-        <p:nvSpPr>
-          <p:cNvPr id="12" name="장식"/>
-          <p:cNvSpPr/>
-          <p:nvPr/>
-        </p:nvSpPr>
-        <p:spPr>
-          <a:xfrm>
-            <a:off x="5726012" y="707976"/>
-            <a:ext cx="148776" cy="148776"/>
-          </a:xfrm>
-          <a:prstGeom prst="ellipse">
-            <a:avLst/>
-          </a:prstGeom>
-          <a:solidFill>
-            <a:srgbClr val="F4DBCD"/>
-          </a:solidFill>
-          <a:ln>
-            <a:noFill/>
-          </a:ln>
-        </p:spPr>
-        <p:txBody>
-          <a:bodyPr rtlCol="0" anchor="ctr"/>
-          <a:lstStyle/>
-          <a:p>
-            <a:pPr algn="ctr"/>
-          </a:p>
-        </p:txBody>
-      </p:sp>
-      <p:sp>
-        <p:nvSpPr>
-          <p:cNvPr id="13" name="장식"/>
-          <p:cNvSpPr/>
-          <p:nvPr/>
-        </p:nvSpPr>
-        <p:spPr>
-          <a:xfrm>
-            <a:off x="6018551" y="1000807"/>
-            <a:ext cx="157967" cy="157967"/>
-          </a:xfrm>
-          <a:prstGeom prst="ellipse">
-            <a:avLst/>
-          </a:prstGeom>
-          <a:solidFill>
-            <a:srgbClr val="3B9185"/>
-          </a:solidFill>
-          <a:ln>
-            <a:noFill/>
-          </a:ln>
-        </p:spPr>
-        <p:txBody>
-          <a:bodyPr rtlCol="0" anchor="ctr"/>
-          <a:lstStyle/>
-          <a:p>
-            <a:pPr algn="ctr"/>
-          </a:p>
-        </p:txBody>
-      </p:sp>
-      <p:sp>
-        <p:nvSpPr>
-          <p:cNvPr id="14" name="장식"/>
-          <p:cNvSpPr/>
-          <p:nvPr/>
-        </p:nvSpPr>
-        <p:spPr>
-          <a:xfrm>
-            <a:off x="5418283" y="615189"/>
-            <a:ext cx="100367" cy="100367"/>
-          </a:xfrm>
-          <a:prstGeom prst="ellipse">
-            <a:avLst/>
-          </a:prstGeom>
-          <a:solidFill>
-            <a:srgbClr val="995229"/>
-          </a:solidFill>
-          <a:ln>
-            <a:noFill/>
-          </a:ln>
-        </p:spPr>
-        <p:txBody>
-          <a:bodyPr rtlCol="0" anchor="ctr"/>
-          <a:lstStyle/>
-          <a:p>
-            <a:pPr algn="ctr"/>
-          </a:p>
-        </p:txBody>
-      </p:sp>
-      <p:sp>
-        <p:nvSpPr>
-          <p:cNvPr id="15" name="장식"/>
-          <p:cNvSpPr/>
-          <p:nvPr/>
-        </p:nvSpPr>
-        <p:spPr>
-          <a:xfrm>
-            <a:off x="5261253" y="721318"/>
-            <a:ext cx="69230" cy="69230"/>
-          </a:xfrm>
-          <a:prstGeom prst="ellipse">
-            <a:avLst/>
-          </a:prstGeom>
-          <a:solidFill>
-            <a:srgbClr val="F4DBCD"/>
-          </a:solidFill>
-          <a:ln>
-            <a:noFill/>
-          </a:ln>
-        </p:spPr>
-        <p:txBody>
-          <a:bodyPr rtlCol="0" anchor="ctr"/>
-          <a:lstStyle/>
-          <a:p>
-            <a:pPr algn="ctr"/>
-          </a:p>
-        </p:txBody>
-      </p:sp>
-      <p:sp>
-        <p:nvSpPr>
           <p:cNvPr id="2" name="Title 1"/>
           <p:cNvSpPr>
             <a:spLocks noGrp="1"/>
@@ -5901,7 +4264,7 @@
       </p:sp>
       <p:sp>
         <p:nvSpPr>
-          <p:cNvPr id="16" name="번호"/>
+          <p:cNvPr id="5" name="번호"/>
           <p:cNvSpPr txBox="1"/>
           <p:nvPr/>
         </p:nvSpPr>
@@ -5939,7 +4302,7 @@
       </p:sp>
       <p:sp>
         <p:nvSpPr>
-          <p:cNvPr id="17" name="본문"/>
+          <p:cNvPr id="6" name="본문"/>
           <p:cNvSpPr txBox="1"/>
           <p:nvPr/>
         </p:nvSpPr>
@@ -5977,7 +4340,7 @@
       </p:sp>
       <p:sp>
         <p:nvSpPr>
-          <p:cNvPr id="18" name="쪽 번호"/>
+          <p:cNvPr id="7" name="쪽 번호"/>
           <p:cNvSpPr txBox="1"/>
           <p:nvPr/>
         </p:nvSpPr>
@@ -6099,325 +4462,6 @@
       </p:sp>
       <p:sp>
         <p:nvSpPr>
-          <p:cNvPr id="5" name="장식"/>
-          <p:cNvSpPr/>
-          <p:nvPr/>
-        </p:nvSpPr>
-        <p:spPr>
-          <a:xfrm>
-            <a:off x="5580842" y="631759"/>
-            <a:ext cx="185261" cy="185261"/>
-          </a:xfrm>
-          <a:prstGeom prst="ellipse">
-            <a:avLst/>
-          </a:prstGeom>
-          <a:solidFill>
-            <a:srgbClr val="995229"/>
-          </a:solidFill>
-          <a:ln>
-            <a:noFill/>
-          </a:ln>
-        </p:spPr>
-        <p:txBody>
-          <a:bodyPr rtlCol="0" anchor="ctr"/>
-          <a:lstStyle/>
-          <a:p>
-            <a:pPr algn="ctr"/>
-          </a:p>
-        </p:txBody>
-      </p:sp>
-      <p:sp>
-        <p:nvSpPr>
-          <p:cNvPr id="6" name="장식"/>
-          <p:cNvSpPr/>
-          <p:nvPr/>
-        </p:nvSpPr>
-        <p:spPr>
-          <a:xfrm>
-            <a:off x="6157340" y="1099893"/>
-            <a:ext cx="111201" cy="111201"/>
-          </a:xfrm>
-          <a:prstGeom prst="ellipse">
-            <a:avLst/>
-          </a:prstGeom>
-          <a:solidFill>
-            <a:srgbClr val="F4DBCD"/>
-          </a:solidFill>
-          <a:ln>
-            <a:noFill/>
-          </a:ln>
-        </p:spPr>
-        <p:txBody>
-          <a:bodyPr rtlCol="0" anchor="ctr"/>
-          <a:lstStyle/>
-          <a:p>
-            <a:pPr algn="ctr"/>
-          </a:p>
-        </p:txBody>
-      </p:sp>
-      <p:sp>
-        <p:nvSpPr>
-          <p:cNvPr id="7" name="장식"/>
-          <p:cNvSpPr/>
-          <p:nvPr/>
-        </p:nvSpPr>
-        <p:spPr>
-          <a:xfrm>
-            <a:off x="5172911" y="843400"/>
-            <a:ext cx="146404" cy="146404"/>
-          </a:xfrm>
-          <a:prstGeom prst="ellipse">
-            <a:avLst/>
-          </a:prstGeom>
-          <a:solidFill>
-            <a:srgbClr val="3B9185"/>
-          </a:solidFill>
-          <a:ln>
-            <a:noFill/>
-          </a:ln>
-        </p:spPr>
-        <p:txBody>
-          <a:bodyPr rtlCol="0" anchor="ctr"/>
-          <a:lstStyle/>
-          <a:p>
-            <a:pPr algn="ctr"/>
-          </a:p>
-        </p:txBody>
-      </p:sp>
-      <p:sp>
-        <p:nvSpPr>
-          <p:cNvPr id="8" name="장식"/>
-          <p:cNvSpPr/>
-          <p:nvPr/>
-        </p:nvSpPr>
-        <p:spPr>
-          <a:xfrm>
-            <a:off x="5864451" y="619708"/>
-            <a:ext cx="120275" cy="120275"/>
-          </a:xfrm>
-          <a:prstGeom prst="ellipse">
-            <a:avLst/>
-          </a:prstGeom>
-          <a:solidFill>
-            <a:srgbClr val="995229"/>
-          </a:solidFill>
-          <a:ln>
-            <a:noFill/>
-          </a:ln>
-        </p:spPr>
-        <p:txBody>
-          <a:bodyPr rtlCol="0" anchor="ctr"/>
-          <a:lstStyle/>
-          <a:p>
-            <a:pPr algn="ctr"/>
-          </a:p>
-        </p:txBody>
-      </p:sp>
-      <p:sp>
-        <p:nvSpPr>
-          <p:cNvPr id="9" name="장식"/>
-          <p:cNvSpPr/>
-          <p:nvPr/>
-        </p:nvSpPr>
-        <p:spPr>
-          <a:xfrm>
-            <a:off x="5699832" y="398225"/>
-            <a:ext cx="186017" cy="186017"/>
-          </a:xfrm>
-          <a:prstGeom prst="ellipse">
-            <a:avLst/>
-          </a:prstGeom>
-          <a:solidFill>
-            <a:srgbClr val="F4DBCD"/>
-          </a:solidFill>
-          <a:ln>
-            <a:noFill/>
-          </a:ln>
-        </p:spPr>
-        <p:txBody>
-          <a:bodyPr rtlCol="0" anchor="ctr"/>
-          <a:lstStyle/>
-          <a:p>
-            <a:pPr algn="ctr"/>
-          </a:p>
-        </p:txBody>
-      </p:sp>
-      <p:sp>
-        <p:nvSpPr>
-          <p:cNvPr id="10" name="장식"/>
-          <p:cNvSpPr/>
-          <p:nvPr/>
-        </p:nvSpPr>
-        <p:spPr>
-          <a:xfrm>
-            <a:off x="5349196" y="656597"/>
-            <a:ext cx="79826" cy="79826"/>
-          </a:xfrm>
-          <a:prstGeom prst="ellipse">
-            <a:avLst/>
-          </a:prstGeom>
-          <a:solidFill>
-            <a:srgbClr val="3B9185"/>
-          </a:solidFill>
-          <a:ln>
-            <a:noFill/>
-          </a:ln>
-        </p:spPr>
-        <p:txBody>
-          <a:bodyPr rtlCol="0" anchor="ctr"/>
-          <a:lstStyle/>
-          <a:p>
-            <a:pPr algn="ctr"/>
-          </a:p>
-        </p:txBody>
-      </p:sp>
-      <p:sp>
-        <p:nvSpPr>
-          <p:cNvPr id="11" name="장식"/>
-          <p:cNvSpPr/>
-          <p:nvPr/>
-        </p:nvSpPr>
-        <p:spPr>
-          <a:xfrm>
-            <a:off x="5967650" y="1367190"/>
-            <a:ext cx="158557" cy="158557"/>
-          </a:xfrm>
-          <a:prstGeom prst="ellipse">
-            <a:avLst/>
-          </a:prstGeom>
-          <a:solidFill>
-            <a:srgbClr val="995229"/>
-          </a:solidFill>
-          <a:ln>
-            <a:noFill/>
-          </a:ln>
-        </p:spPr>
-        <p:txBody>
-          <a:bodyPr rtlCol="0" anchor="ctr"/>
-          <a:lstStyle/>
-          <a:p>
-            <a:pPr algn="ctr"/>
-          </a:p>
-        </p:txBody>
-      </p:sp>
-      <p:sp>
-        <p:nvSpPr>
-          <p:cNvPr id="12" name="장식"/>
-          <p:cNvSpPr/>
-          <p:nvPr/>
-        </p:nvSpPr>
-        <p:spPr>
-          <a:xfrm>
-            <a:off x="5726012" y="707976"/>
-            <a:ext cx="148776" cy="148776"/>
-          </a:xfrm>
-          <a:prstGeom prst="ellipse">
-            <a:avLst/>
-          </a:prstGeom>
-          <a:solidFill>
-            <a:srgbClr val="F4DBCD"/>
-          </a:solidFill>
-          <a:ln>
-            <a:noFill/>
-          </a:ln>
-        </p:spPr>
-        <p:txBody>
-          <a:bodyPr rtlCol="0" anchor="ctr"/>
-          <a:lstStyle/>
-          <a:p>
-            <a:pPr algn="ctr"/>
-          </a:p>
-        </p:txBody>
-      </p:sp>
-      <p:sp>
-        <p:nvSpPr>
-          <p:cNvPr id="13" name="장식"/>
-          <p:cNvSpPr/>
-          <p:nvPr/>
-        </p:nvSpPr>
-        <p:spPr>
-          <a:xfrm>
-            <a:off x="6018551" y="1000807"/>
-            <a:ext cx="157967" cy="157967"/>
-          </a:xfrm>
-          <a:prstGeom prst="ellipse">
-            <a:avLst/>
-          </a:prstGeom>
-          <a:solidFill>
-            <a:srgbClr val="3B9185"/>
-          </a:solidFill>
-          <a:ln>
-            <a:noFill/>
-          </a:ln>
-        </p:spPr>
-        <p:txBody>
-          <a:bodyPr rtlCol="0" anchor="ctr"/>
-          <a:lstStyle/>
-          <a:p>
-            <a:pPr algn="ctr"/>
-          </a:p>
-        </p:txBody>
-      </p:sp>
-      <p:sp>
-        <p:nvSpPr>
-          <p:cNvPr id="14" name="장식"/>
-          <p:cNvSpPr/>
-          <p:nvPr/>
-        </p:nvSpPr>
-        <p:spPr>
-          <a:xfrm>
-            <a:off x="5418283" y="615189"/>
-            <a:ext cx="100367" cy="100367"/>
-          </a:xfrm>
-          <a:prstGeom prst="ellipse">
-            <a:avLst/>
-          </a:prstGeom>
-          <a:solidFill>
-            <a:srgbClr val="995229"/>
-          </a:solidFill>
-          <a:ln>
-            <a:noFill/>
-          </a:ln>
-        </p:spPr>
-        <p:txBody>
-          <a:bodyPr rtlCol="0" anchor="ctr"/>
-          <a:lstStyle/>
-          <a:p>
-            <a:pPr algn="ctr"/>
-          </a:p>
-        </p:txBody>
-      </p:sp>
-      <p:sp>
-        <p:nvSpPr>
-          <p:cNvPr id="15" name="장식"/>
-          <p:cNvSpPr/>
-          <p:nvPr/>
-        </p:nvSpPr>
-        <p:spPr>
-          <a:xfrm>
-            <a:off x="5261253" y="721318"/>
-            <a:ext cx="69230" cy="69230"/>
-          </a:xfrm>
-          <a:prstGeom prst="ellipse">
-            <a:avLst/>
-          </a:prstGeom>
-          <a:solidFill>
-            <a:srgbClr val="F4DBCD"/>
-          </a:solidFill>
-          <a:ln>
-            <a:noFill/>
-          </a:ln>
-        </p:spPr>
-        <p:txBody>
-          <a:bodyPr rtlCol="0" anchor="ctr"/>
-          <a:lstStyle/>
-          <a:p>
-            <a:pPr algn="ctr"/>
-          </a:p>
-        </p:txBody>
-      </p:sp>
-      <p:sp>
-        <p:nvSpPr>
           <p:cNvPr id="2" name="Title 1"/>
           <p:cNvSpPr>
             <a:spLocks noGrp="1"/>
@@ -6456,7 +4500,7 @@
       </p:sp>
       <p:sp>
         <p:nvSpPr>
-          <p:cNvPr id="16" name="번호"/>
+          <p:cNvPr id="5" name="번호"/>
           <p:cNvSpPr txBox="1"/>
           <p:nvPr/>
         </p:nvSpPr>
@@ -6494,7 +4538,7 @@
       </p:sp>
       <p:sp>
         <p:nvSpPr>
-          <p:cNvPr id="17" name="본문"/>
+          <p:cNvPr id="6" name="본문"/>
           <p:cNvSpPr txBox="1"/>
           <p:nvPr/>
         </p:nvSpPr>
@@ -6532,7 +4576,7 @@
       </p:sp>
       <p:sp>
         <p:nvSpPr>
-          <p:cNvPr id="18" name="쪽 번호"/>
+          <p:cNvPr id="7" name="쪽 번호"/>
           <p:cNvSpPr txBox="1"/>
           <p:nvPr/>
         </p:nvSpPr>
@@ -6579,14 +4623,6 @@
 <file path=ppt/slides/slide7.xml><?xml version="1.0" encoding="utf-8"?>
 <p:sld xmlns:a="http://schemas.openxmlformats.org/drawingml/2006/main" xmlns:p="http://schemas.openxmlformats.org/presentationml/2006/main" xmlns:r="http://schemas.openxmlformats.org/officeDocument/2006/relationships">
   <p:cSld>
-    <p:bg>
-      <p:bgPr>
-        <a:solidFill>
-          <a:srgbClr val="FBF3EF"/>
-        </a:solidFill>
-        <a:effectLst/>
-      </p:bgPr>
-    </p:bg>
     <p:spTree>
       <p:nvGrpSpPr>
         <p:cNvPr id="1" name=""/>
@@ -6594,383 +4630,30 @@
         <p:nvPr/>
       </p:nvGrpSpPr>
       <p:grpSpPr/>
-      <p:sp>
-        <p:nvSpPr>
-          <p:cNvPr id="3" name="장식"/>
-          <p:cNvSpPr/>
+      <p:pic>
+        <p:nvPicPr>
+          <p:cNvPr id="3" name="표지 그림" descr="news-38.jpg"/>
+          <p:cNvPicPr>
+            <a:picLocks noChangeAspect="1"/>
+          </p:cNvPicPr>
           <p:nvPr/>
-        </p:nvSpPr>
-        <p:spPr>
-          <a:xfrm>
-            <a:off x="274320" y="274320"/>
-            <a:ext cx="6309360" cy="6309360"/>
+        </p:nvPicPr>
+        <p:blipFill>
+          <a:blip r:embed="rId2"/>
+          <a:stretch>
+            <a:fillRect/>
+          </a:stretch>
+        </p:blipFill>
+        <p:spPr>
+          <a:xfrm>
+            <a:off x="0" y="0"/>
+            <a:ext cx="6858000" cy="6858000"/>
           </a:xfrm>
           <a:prstGeom prst="rect">
             <a:avLst/>
           </a:prstGeom>
-          <a:noFill/>
-          <a:ln w="38100">
-            <a:solidFill>
-              <a:srgbClr val="995229"/>
-            </a:solidFill>
-          </a:ln>
-        </p:spPr>
-        <p:txBody>
-          <a:bodyPr rtlCol="0" anchor="ctr"/>
-          <a:lstStyle/>
-          <a:p>
-            <a:pPr algn="ctr"/>
-          </a:p>
-        </p:txBody>
-      </p:sp>
-      <p:sp>
-        <p:nvSpPr>
-          <p:cNvPr id="4" name="장식"/>
-          <p:cNvSpPr/>
-          <p:nvPr/>
-        </p:nvSpPr>
-        <p:spPr>
-          <a:xfrm>
-            <a:off x="457200" y="457200"/>
-            <a:ext cx="5943600" cy="5943600"/>
-          </a:xfrm>
-          <a:prstGeom prst="rect">
-            <a:avLst/>
-          </a:prstGeom>
-          <a:noFill/>
-          <a:ln w="12700">
-            <a:solidFill>
-              <a:srgbClr val="F4DBCD"/>
-            </a:solidFill>
-          </a:ln>
-        </p:spPr>
-        <p:txBody>
-          <a:bodyPr rtlCol="0" anchor="ctr"/>
-          <a:lstStyle/>
-          <a:p>
-            <a:pPr algn="ctr"/>
-          </a:p>
-        </p:txBody>
-      </p:sp>
-      <p:sp>
-        <p:nvSpPr>
-          <p:cNvPr id="5" name="장식"/>
-          <p:cNvSpPr/>
-          <p:nvPr/>
-        </p:nvSpPr>
-        <p:spPr>
-          <a:xfrm>
-            <a:off x="3187517" y="780551"/>
-            <a:ext cx="333470" cy="333470"/>
-          </a:xfrm>
-          <a:prstGeom prst="ellipse">
-            <a:avLst/>
-          </a:prstGeom>
-          <a:solidFill>
-            <a:srgbClr val="995229"/>
-          </a:solidFill>
-          <a:ln>
-            <a:noFill/>
-          </a:ln>
-        </p:spPr>
-        <p:txBody>
-          <a:bodyPr rtlCol="0" anchor="ctr"/>
-          <a:lstStyle/>
-          <a:p>
-            <a:pPr algn="ctr"/>
-          </a:p>
-        </p:txBody>
-      </p:sp>
-      <p:sp>
-        <p:nvSpPr>
-          <p:cNvPr id="6" name="장식"/>
-          <p:cNvSpPr/>
-          <p:nvPr/>
-        </p:nvSpPr>
-        <p:spPr>
-          <a:xfrm>
-            <a:off x="4225213" y="1623191"/>
-            <a:ext cx="200163" cy="200163"/>
-          </a:xfrm>
-          <a:prstGeom prst="ellipse">
-            <a:avLst/>
-          </a:prstGeom>
-          <a:solidFill>
-            <a:srgbClr val="F4DBCD"/>
-          </a:solidFill>
-          <a:ln>
-            <a:noFill/>
-          </a:ln>
-        </p:spPr>
-        <p:txBody>
-          <a:bodyPr rtlCol="0" anchor="ctr"/>
-          <a:lstStyle/>
-          <a:p>
-            <a:pPr algn="ctr"/>
-          </a:p>
-        </p:txBody>
-      </p:sp>
-      <p:sp>
-        <p:nvSpPr>
-          <p:cNvPr id="7" name="장식"/>
-          <p:cNvSpPr/>
-          <p:nvPr/>
-        </p:nvSpPr>
-        <p:spPr>
-          <a:xfrm>
-            <a:off x="2453241" y="1161505"/>
-            <a:ext cx="263527" cy="263527"/>
-          </a:xfrm>
-          <a:prstGeom prst="ellipse">
-            <a:avLst/>
-          </a:prstGeom>
-          <a:solidFill>
-            <a:srgbClr val="3B9185"/>
-          </a:solidFill>
-          <a:ln>
-            <a:noFill/>
-          </a:ln>
-        </p:spPr>
-        <p:txBody>
-          <a:bodyPr rtlCol="0" anchor="ctr"/>
-          <a:lstStyle/>
-          <a:p>
-            <a:pPr algn="ctr"/>
-          </a:p>
-        </p:txBody>
-      </p:sp>
-      <p:sp>
-        <p:nvSpPr>
-          <p:cNvPr id="8" name="장식"/>
-          <p:cNvSpPr/>
-          <p:nvPr/>
-        </p:nvSpPr>
-        <p:spPr>
-          <a:xfrm>
-            <a:off x="3698011" y="758859"/>
-            <a:ext cx="216496" cy="216496"/>
-          </a:xfrm>
-          <a:prstGeom prst="ellipse">
-            <a:avLst/>
-          </a:prstGeom>
-          <a:solidFill>
-            <a:srgbClr val="995229"/>
-          </a:solidFill>
-          <a:ln>
-            <a:noFill/>
-          </a:ln>
-        </p:spPr>
-        <p:txBody>
-          <a:bodyPr rtlCol="0" anchor="ctr"/>
-          <a:lstStyle/>
-          <a:p>
-            <a:pPr algn="ctr"/>
-          </a:p>
-        </p:txBody>
-      </p:sp>
-      <p:sp>
-        <p:nvSpPr>
-          <p:cNvPr id="9" name="장식"/>
-          <p:cNvSpPr/>
-          <p:nvPr/>
-        </p:nvSpPr>
-        <p:spPr>
-          <a:xfrm>
-            <a:off x="3401698" y="360190"/>
-            <a:ext cx="334832" cy="334832"/>
-          </a:xfrm>
-          <a:prstGeom prst="ellipse">
-            <a:avLst/>
-          </a:prstGeom>
-          <a:solidFill>
-            <a:srgbClr val="F4DBCD"/>
-          </a:solidFill>
-          <a:ln>
-            <a:noFill/>
-          </a:ln>
-        </p:spPr>
-        <p:txBody>
-          <a:bodyPr rtlCol="0" anchor="ctr"/>
-          <a:lstStyle/>
-          <a:p>
-            <a:pPr algn="ctr"/>
-          </a:p>
-        </p:txBody>
-      </p:sp>
-      <p:sp>
-        <p:nvSpPr>
-          <p:cNvPr id="10" name="장식"/>
-          <p:cNvSpPr/>
-          <p:nvPr/>
-        </p:nvSpPr>
-        <p:spPr>
-          <a:xfrm>
-            <a:off x="2770553" y="825259"/>
-            <a:ext cx="143688" cy="143688"/>
-          </a:xfrm>
-          <a:prstGeom prst="ellipse">
-            <a:avLst/>
-          </a:prstGeom>
-          <a:solidFill>
-            <a:srgbClr val="3B9185"/>
-          </a:solidFill>
-          <a:ln>
-            <a:noFill/>
-          </a:ln>
-        </p:spPr>
-        <p:txBody>
-          <a:bodyPr rtlCol="0" anchor="ctr"/>
-          <a:lstStyle/>
-          <a:p>
-            <a:pPr algn="ctr"/>
-          </a:p>
-        </p:txBody>
-      </p:sp>
-      <p:sp>
-        <p:nvSpPr>
-          <p:cNvPr id="11" name="장식"/>
-          <p:cNvSpPr/>
-          <p:nvPr/>
-        </p:nvSpPr>
-        <p:spPr>
-          <a:xfrm>
-            <a:off x="3883770" y="2104327"/>
-            <a:ext cx="285402" cy="285402"/>
-          </a:xfrm>
-          <a:prstGeom prst="ellipse">
-            <a:avLst/>
-          </a:prstGeom>
-          <a:solidFill>
-            <a:srgbClr val="995229"/>
-          </a:solidFill>
-          <a:ln>
-            <a:noFill/>
-          </a:ln>
-        </p:spPr>
-        <p:txBody>
-          <a:bodyPr rtlCol="0" anchor="ctr"/>
-          <a:lstStyle/>
-          <a:p>
-            <a:pPr algn="ctr"/>
-          </a:p>
-        </p:txBody>
-      </p:sp>
-      <p:sp>
-        <p:nvSpPr>
-          <p:cNvPr id="12" name="장식"/>
-          <p:cNvSpPr/>
-          <p:nvPr/>
-        </p:nvSpPr>
-        <p:spPr>
-          <a:xfrm>
-            <a:off x="3448822" y="917740"/>
-            <a:ext cx="267797" cy="267797"/>
-          </a:xfrm>
-          <a:prstGeom prst="ellipse">
-            <a:avLst/>
-          </a:prstGeom>
-          <a:solidFill>
-            <a:srgbClr val="F4DBCD"/>
-          </a:solidFill>
-          <a:ln>
-            <a:noFill/>
-          </a:ln>
-        </p:spPr>
-        <p:txBody>
-          <a:bodyPr rtlCol="0" anchor="ctr"/>
-          <a:lstStyle/>
-          <a:p>
-            <a:pPr algn="ctr"/>
-          </a:p>
-        </p:txBody>
-      </p:sp>
-      <p:sp>
-        <p:nvSpPr>
-          <p:cNvPr id="13" name="장식"/>
-          <p:cNvSpPr/>
-          <p:nvPr/>
-        </p:nvSpPr>
-        <p:spPr>
-          <a:xfrm>
-            <a:off x="3975393" y="1444838"/>
-            <a:ext cx="284342" cy="284342"/>
-          </a:xfrm>
-          <a:prstGeom prst="ellipse">
-            <a:avLst/>
-          </a:prstGeom>
-          <a:solidFill>
-            <a:srgbClr val="3B9185"/>
-          </a:solidFill>
-          <a:ln>
-            <a:noFill/>
-          </a:ln>
-        </p:spPr>
-        <p:txBody>
-          <a:bodyPr rtlCol="0" anchor="ctr"/>
-          <a:lstStyle/>
-          <a:p>
-            <a:pPr algn="ctr"/>
-          </a:p>
-        </p:txBody>
-      </p:sp>
-      <p:sp>
-        <p:nvSpPr>
-          <p:cNvPr id="14" name="장식"/>
-          <p:cNvSpPr/>
-          <p:nvPr/>
-        </p:nvSpPr>
-        <p:spPr>
-          <a:xfrm>
-            <a:off x="2894909" y="750724"/>
-            <a:ext cx="180660" cy="180660"/>
-          </a:xfrm>
-          <a:prstGeom prst="ellipse">
-            <a:avLst/>
-          </a:prstGeom>
-          <a:solidFill>
-            <a:srgbClr val="995229"/>
-          </a:solidFill>
-          <a:ln>
-            <a:noFill/>
-          </a:ln>
-        </p:spPr>
-        <p:txBody>
-          <a:bodyPr rtlCol="0" anchor="ctr"/>
-          <a:lstStyle/>
-          <a:p>
-            <a:pPr algn="ctr"/>
-          </a:p>
-        </p:txBody>
-      </p:sp>
-      <p:sp>
-        <p:nvSpPr>
-          <p:cNvPr id="15" name="장식"/>
-          <p:cNvSpPr/>
-          <p:nvPr/>
-        </p:nvSpPr>
-        <p:spPr>
-          <a:xfrm>
-            <a:off x="2612256" y="941758"/>
-            <a:ext cx="124614" cy="124614"/>
-          </a:xfrm>
-          <a:prstGeom prst="ellipse">
-            <a:avLst/>
-          </a:prstGeom>
-          <a:solidFill>
-            <a:srgbClr val="F4DBCD"/>
-          </a:solidFill>
-          <a:ln>
-            <a:noFill/>
-          </a:ln>
-        </p:spPr>
-        <p:txBody>
-          <a:bodyPr rtlCol="0" anchor="ctr"/>
-          <a:lstStyle/>
-          <a:p>
-            <a:pPr algn="ctr"/>
-          </a:p>
-        </p:txBody>
-      </p:sp>
+        </p:spPr>
+      </p:pic>
       <p:sp>
         <p:nvSpPr>
           <p:cNvPr id="2" name="Title 1"/>
@@ -6983,8 +4666,8 @@
         </p:nvSpPr>
         <p:spPr>
           <a:xfrm>
-            <a:off x="822959" y="2331720"/>
-            <a:ext cx="5212080" cy="1371600"/>
+            <a:off x="685800" y="960120"/>
+            <a:ext cx="5486400" cy="1463040"/>
           </a:xfrm>
         </p:spPr>
         <p:txBody>
@@ -6993,7 +4676,7 @@
           </a:bodyPr>
           <a:lstStyle/>
           <a:p>
-            <a:pPr algn="ctr">
+            <a:pPr algn="l">
               <a:lnSpc>
                 <a:spcPct val="105000"/>
               </a:lnSpc>
@@ -7011,14 +4694,14 @@
       </p:sp>
       <p:sp>
         <p:nvSpPr>
-          <p:cNvPr id="16" name="한 줄 문구"/>
+          <p:cNvPr id="4" name="한 줄 문구"/>
           <p:cNvSpPr txBox="1"/>
           <p:nvPr/>
         </p:nvSpPr>
         <p:spPr>
           <a:xfrm>
-            <a:off x="822959" y="3794760"/>
-            <a:ext cx="5212080" cy="822960"/>
+            <a:off x="685800" y="2560320"/>
+            <a:ext cx="5486400" cy="822960"/>
           </a:xfrm>
           <a:prstGeom prst="rect">
             <a:avLst/>
@@ -7031,7 +4714,7 @@
           </a:bodyPr>
           <a:lstStyle/>
           <a:p>
-            <a:pPr algn="ctr">
+            <a:pPr algn="l">
               <a:lnSpc>
                 <a:spcPct val="115000"/>
               </a:lnSpc>
@@ -7049,14 +4732,14 @@
       </p:sp>
       <p:sp>
         <p:nvSpPr>
-          <p:cNvPr id="17" name="안내 문구"/>
+          <p:cNvPr id="5" name="안내 문구"/>
           <p:cNvSpPr txBox="1"/>
           <p:nvPr/>
         </p:nvSpPr>
         <p:spPr>
           <a:xfrm>
-            <a:off x="822959" y="4663440"/>
-            <a:ext cx="5212080" cy="914400"/>
+            <a:off x="685800" y="3429000"/>
+            <a:ext cx="5486400" cy="914400"/>
           </a:xfrm>
           <a:prstGeom prst="rect">
             <a:avLst/>
@@ -7069,7 +4752,7 @@
           </a:bodyPr>
           <a:lstStyle/>
           <a:p>
-            <a:pPr algn="ctr">
+            <a:pPr algn="l">
               <a:lnSpc>
                 <a:spcPct val="115000"/>
               </a:lnSpc>
